--- a/slides-pptx/03-Python_intro-syntax.pptx
+++ b/slides-pptx/03-Python_intro-syntax.pptx
@@ -641,7 +641,7 @@
           <a:p>
             <a:fld id="{7A375BC9-5AAE-4E1F-9FAE-BC04149B1DB3}" type="datetimeFigureOut">
               <a:rPr lang="nl-BE" smtClean="0"/>
-              <a:t>13/10/2025</a:t>
+              <a:t>2/10/2026</a:t>
             </a:fld>
             <a:endParaRPr lang="nl-BE"/>
           </a:p>
@@ -1124,7 +1124,7 @@
           <a:p>
             <a:fld id="{25D4C14B-8B81-49E7-9BC7-8AE29B5E2ADB}" type="datetimeFigureOut">
               <a:rPr lang="nl-BE" smtClean="0"/>
-              <a:t>13/10/2025</a:t>
+              <a:t>2/10/2026</a:t>
             </a:fld>
             <a:endParaRPr lang="nl-BE"/>
           </a:p>
@@ -1294,7 +1294,7 @@
           <a:p>
             <a:fld id="{25D4C14B-8B81-49E7-9BC7-8AE29B5E2ADB}" type="datetimeFigureOut">
               <a:rPr lang="nl-BE" smtClean="0"/>
-              <a:t>13/10/2025</a:t>
+              <a:t>2/10/2026</a:t>
             </a:fld>
             <a:endParaRPr lang="nl-BE"/>
           </a:p>
@@ -1474,7 +1474,7 @@
           <a:p>
             <a:fld id="{25D4C14B-8B81-49E7-9BC7-8AE29B5E2ADB}" type="datetimeFigureOut">
               <a:rPr lang="nl-BE" smtClean="0"/>
-              <a:t>13/10/2025</a:t>
+              <a:t>2/10/2026</a:t>
             </a:fld>
             <a:endParaRPr lang="nl-BE"/>
           </a:p>
@@ -1644,7 +1644,7 @@
           <a:p>
             <a:fld id="{25D4C14B-8B81-49E7-9BC7-8AE29B5E2ADB}" type="datetimeFigureOut">
               <a:rPr lang="nl-BE" smtClean="0"/>
-              <a:t>13/10/2025</a:t>
+              <a:t>2/10/2026</a:t>
             </a:fld>
             <a:endParaRPr lang="nl-BE"/>
           </a:p>
@@ -1890,7 +1890,7 @@
           <a:p>
             <a:fld id="{25D4C14B-8B81-49E7-9BC7-8AE29B5E2ADB}" type="datetimeFigureOut">
               <a:rPr lang="nl-BE" smtClean="0"/>
-              <a:t>13/10/2025</a:t>
+              <a:t>2/10/2026</a:t>
             </a:fld>
             <a:endParaRPr lang="nl-BE"/>
           </a:p>
@@ -2122,7 +2122,7 @@
           <a:p>
             <a:fld id="{25D4C14B-8B81-49E7-9BC7-8AE29B5E2ADB}" type="datetimeFigureOut">
               <a:rPr lang="nl-BE" smtClean="0"/>
-              <a:t>13/10/2025</a:t>
+              <a:t>2/10/2026</a:t>
             </a:fld>
             <a:endParaRPr lang="nl-BE"/>
           </a:p>
@@ -2489,7 +2489,7 @@
           <a:p>
             <a:fld id="{25D4C14B-8B81-49E7-9BC7-8AE29B5E2ADB}" type="datetimeFigureOut">
               <a:rPr lang="nl-BE" smtClean="0"/>
-              <a:t>13/10/2025</a:t>
+              <a:t>2/10/2026</a:t>
             </a:fld>
             <a:endParaRPr lang="nl-BE"/>
           </a:p>
@@ -2607,7 +2607,7 @@
           <a:p>
             <a:fld id="{25D4C14B-8B81-49E7-9BC7-8AE29B5E2ADB}" type="datetimeFigureOut">
               <a:rPr lang="nl-BE" smtClean="0"/>
-              <a:t>13/10/2025</a:t>
+              <a:t>2/10/2026</a:t>
             </a:fld>
             <a:endParaRPr lang="nl-BE"/>
           </a:p>
@@ -2702,7 +2702,7 @@
           <a:p>
             <a:fld id="{25D4C14B-8B81-49E7-9BC7-8AE29B5E2ADB}" type="datetimeFigureOut">
               <a:rPr lang="nl-BE" smtClean="0"/>
-              <a:t>13/10/2025</a:t>
+              <a:t>2/10/2026</a:t>
             </a:fld>
             <a:endParaRPr lang="nl-BE"/>
           </a:p>
@@ -2979,7 +2979,7 @@
           <a:p>
             <a:fld id="{25D4C14B-8B81-49E7-9BC7-8AE29B5E2ADB}" type="datetimeFigureOut">
               <a:rPr lang="nl-BE" smtClean="0"/>
-              <a:t>13/10/2025</a:t>
+              <a:t>2/10/2026</a:t>
             </a:fld>
             <a:endParaRPr lang="nl-BE"/>
           </a:p>
@@ -3232,7 +3232,7 @@
           <a:p>
             <a:fld id="{25D4C14B-8B81-49E7-9BC7-8AE29B5E2ADB}" type="datetimeFigureOut">
               <a:rPr lang="nl-BE" smtClean="0"/>
-              <a:t>13/10/2025</a:t>
+              <a:t>2/10/2026</a:t>
             </a:fld>
             <a:endParaRPr lang="nl-BE"/>
           </a:p>
@@ -3445,7 +3445,7 @@
           <a:p>
             <a:fld id="{25D4C14B-8B81-49E7-9BC7-8AE29B5E2ADB}" type="datetimeFigureOut">
               <a:rPr lang="nl-BE" smtClean="0"/>
-              <a:t>13/10/2025</a:t>
+              <a:t>2/10/2026</a:t>
             </a:fld>
             <a:endParaRPr lang="nl-BE"/>
           </a:p>
@@ -8663,6 +8663,49 @@
             </a:r>
             <a:endParaRPr lang="nl-BE" dirty="0"/>
           </a:p>
+          <a:p>
+            <a:pPr lvl="1" algn="just"/>
+            <a:r>
+              <a:rPr lang="nl-BE" dirty="0" err="1"/>
+              <a:t>Use</a:t>
+            </a:r>
+            <a:r>
+              <a:rPr lang="nl-BE" dirty="0"/>
+              <a:t> a </a:t>
+            </a:r>
+            <a:r>
+              <a:rPr lang="nl-BE" dirty="0" err="1"/>
+              <a:t>linter</a:t>
+            </a:r>
+            <a:r>
+              <a:rPr lang="nl-BE" dirty="0"/>
+              <a:t> (e.g. flake8, </a:t>
+            </a:r>
+            <a:r>
+              <a:rPr lang="nl-BE" dirty="0" err="1"/>
+              <a:t>pylint</a:t>
+            </a:r>
+            <a:r>
+              <a:rPr lang="nl-BE" dirty="0"/>
+              <a:t>, </a:t>
+            </a:r>
+            <a:r>
+              <a:rPr lang="nl-BE" dirty="0" err="1"/>
+              <a:t>ruff</a:t>
+            </a:r>
+            <a:r>
+              <a:rPr lang="nl-BE" dirty="0"/>
+              <a:t>, </a:t>
+            </a:r>
+            <a:r>
+              <a:rPr lang="nl-BE" dirty="0" err="1"/>
+              <a:t>etc</a:t>
+            </a:r>
+            <a:r>
+              <a:rPr lang="nl-BE" dirty="0"/>
+              <a:t>)</a:t>
+            </a:r>
+          </a:p>
         </p:txBody>
       </p:sp>
     </p:spTree>
@@ -9031,7 +9074,26 @@
             <a:pPr lvl="1"/>
             <a:r>
               <a:rPr lang="en-US" dirty="0"/>
-              <a:t>Python-aware editor can help</a:t>
+              <a:t>IDEs have comment/uncomment </a:t>
+            </a:r>
+            <a:r>
+              <a:rPr lang="en-US" dirty="0" err="1"/>
+              <a:t>shortkeys</a:t>
+            </a:r>
+            <a:r>
+              <a:rPr lang="en-US" dirty="0"/>
+              <a:t> (e.g. </a:t>
+            </a:r>
+            <a:r>
+              <a:rPr lang="en-US" dirty="0">
+                <a:latin typeface="Courier New" panose="02070309020205020404" pitchFamily="49" charset="0"/>
+                <a:cs typeface="Courier New" panose="02070309020205020404" pitchFamily="49" charset="0"/>
+              </a:rPr>
+              <a:t>Ctrl+/</a:t>
+            </a:r>
+            <a:r>
+              <a:rPr lang="en-US" dirty="0"/>
+              <a:t>)</a:t>
             </a:r>
           </a:p>
           <a:p>
@@ -9206,7 +9268,18 @@
           <a:p>
             <a:r>
               <a:rPr lang="en-US" dirty="0"/>
-              <a:t>Continuation: continue to the next line, use the \ marker</a:t>
+              <a:t>Continuation: continue to the next line, use the </a:t>
+            </a:r>
+            <a:r>
+              <a:rPr lang="en-US" dirty="0">
+                <a:latin typeface="Courier New" panose="02070309020205020404" pitchFamily="49" charset="0"/>
+                <a:cs typeface="Courier New" panose="02070309020205020404" pitchFamily="49" charset="0"/>
+              </a:rPr>
+              <a:t>\</a:t>
+            </a:r>
+            <a:r>
+              <a:rPr lang="en-US" dirty="0"/>
+              <a:t> marker</a:t>
             </a:r>
           </a:p>
           <a:p>
@@ -9420,14 +9493,36 @@
             <a:pPr lvl="2"/>
             <a:r>
               <a:rPr lang="en-US" dirty="0"/>
-              <a:t>Code to run within a loop</a:t>
+              <a:t>Code to run within a (</a:t>
+            </a:r>
+            <a:r>
+              <a:rPr lang="en-US" dirty="0">
+                <a:latin typeface="Courier New" panose="02070309020205020404" pitchFamily="49" charset="0"/>
+                <a:cs typeface="Courier New" panose="02070309020205020404" pitchFamily="49" charset="0"/>
+              </a:rPr>
+              <a:t>for</a:t>
+            </a:r>
+            <a:r>
+              <a:rPr lang="en-US" dirty="0"/>
+              <a:t>) loop</a:t>
             </a:r>
           </a:p>
           <a:p>
             <a:pPr lvl="2"/>
             <a:r>
               <a:rPr lang="en-US" dirty="0"/>
-              <a:t>Code to run (or not) depending on a logical test</a:t>
+              <a:t>Code to run (or not) depending on a logical (</a:t>
+            </a:r>
+            <a:r>
+              <a:rPr lang="en-US" dirty="0">
+                <a:latin typeface="Courier New" panose="02070309020205020404" pitchFamily="49" charset="0"/>
+                <a:cs typeface="Courier New" panose="02070309020205020404" pitchFamily="49" charset="0"/>
+              </a:rPr>
+              <a:t>if</a:t>
+            </a:r>
+            <a:r>
+              <a:rPr lang="en-US" dirty="0"/>
+              <a:t>) test</a:t>
             </a:r>
             <a:endParaRPr lang="en-US" b="1" dirty="0"/>
           </a:p>
